--- a/artifacts/external-markdown-visual-eval/iteration-04/build/deck.pptx
+++ b/artifacts/external-markdown-visual-eval/iteration-04/build/deck.pptx
@@ -28023,7 +28023,7 @@
                 <a:ea typeface="Pretendard" pitchFamily="34" charset="-122"/>
                 <a:cs typeface="Pretendard" pitchFamily="34" charset="-120"/>
               </a:rPr>
-              <a:t>  iteration 4 of 4.</a:t>
+              <a:t>  iteration 4 of 5.</a:t>
             </a:r>
             <a:endParaRPr lang="en-US" sz="2200" dirty="0"/>
           </a:p>
